--- a/lessons/1-7/slides.pptx
+++ b/lessons/1-7/slides.pptx
@@ -10664,7 +10664,7 @@
       </p:sp>
       <p:sp>
         <p:nvSpPr>
-          <p:cNvPr id="20" name="Shape 18"/>
+          <p:cNvPr id="20" name="Text 18"/>
           <p:cNvSpPr/>
           <p:nvPr/>
         </p:nvSpPr>
@@ -10685,33 +10685,7 @@
             <a:solidFill>
               <a:srgbClr val="D6DBDF"/>
             </a:solidFill>
-            <a:prstDash val="solid"/>
           </a:ln>
-          <a:effectLst>
-            <a:outerShdw sx="100000" sy="100000" kx="0" ky="0" algn="bl" rotWithShape="0" blurRad="50800" dist="12700" dir="5400000">
-              <a:srgbClr val="1C2E42">
-                <a:alpha val="10000"/>
-              </a:srgbClr>
-            </a:outerShdw>
-          </a:effectLst>
-        </p:spPr>
-      </p:sp>
-      <p:sp>
-        <p:nvSpPr>
-          <p:cNvPr id="21" name="Text 19"/>
-          <p:cNvSpPr/>
-          <p:nvPr/>
-        </p:nvSpPr>
-        <p:spPr>
-          <a:xfrm>
-            <a:off x="685800" y="1481328"/>
-            <a:ext cx="1447800" cy="384048"/>
-          </a:xfrm>
-          <a:prstGeom prst="rect">
-            <a:avLst/>
-          </a:prstGeom>
-          <a:noFill/>
-          <a:ln/>
         </p:spPr>
         <p:txBody>
           <a:bodyPr wrap="square" rtlCol="0" anchor="ctr"/>
@@ -10721,7 +10695,7 @@
               <a:buNone/>
             </a:pPr>
             <a:r>
-              <a:rPr lang="en-US" sz="900" dirty="0">
+              <a:rPr lang="en-US" sz="900" b="1" dirty="0">
                 <a:solidFill>
                   <a:srgbClr val="17324D"/>
                 </a:solidFill>
@@ -10737,7 +10711,7 @@
       </p:sp>
       <p:sp>
         <p:nvSpPr>
-          <p:cNvPr id="22" name="Shape 20"/>
+          <p:cNvPr id="21" name="Text 19"/>
           <p:cNvSpPr/>
           <p:nvPr/>
         </p:nvSpPr>
@@ -10758,33 +10732,7 @@
             <a:solidFill>
               <a:srgbClr val="D6DBDF"/>
             </a:solidFill>
-            <a:prstDash val="solid"/>
           </a:ln>
-          <a:effectLst>
-            <a:outerShdw sx="100000" sy="100000" kx="0" ky="0" algn="bl" rotWithShape="0" blurRad="50800" dist="12700" dir="5400000">
-              <a:srgbClr val="1C2E42">
-                <a:alpha val="10000"/>
-              </a:srgbClr>
-            </a:outerShdw>
-          </a:effectLst>
-        </p:spPr>
-      </p:sp>
-      <p:sp>
-        <p:nvSpPr>
-          <p:cNvPr id="23" name="Text 21"/>
-          <p:cNvSpPr/>
-          <p:nvPr/>
-        </p:nvSpPr>
-        <p:spPr>
-          <a:xfrm>
-            <a:off x="2453640" y="1481328"/>
-            <a:ext cx="1447800" cy="384048"/>
-          </a:xfrm>
-          <a:prstGeom prst="rect">
-            <a:avLst/>
-          </a:prstGeom>
-          <a:noFill/>
-          <a:ln/>
         </p:spPr>
         <p:txBody>
           <a:bodyPr wrap="square" rtlCol="0" anchor="ctr"/>
@@ -10794,7 +10742,7 @@
               <a:buNone/>
             </a:pPr>
             <a:r>
-              <a:rPr lang="en-US" sz="900" dirty="0">
+              <a:rPr lang="en-US" sz="900" b="1" dirty="0">
                 <a:solidFill>
                   <a:srgbClr val="17324D"/>
                 </a:solidFill>
@@ -10810,7 +10758,7 @@
       </p:sp>
       <p:sp>
         <p:nvSpPr>
-          <p:cNvPr id="24" name="Shape 22"/>
+          <p:cNvPr id="22" name="Text 20"/>
           <p:cNvSpPr/>
           <p:nvPr/>
         </p:nvSpPr>
@@ -10831,33 +10779,7 @@
             <a:solidFill>
               <a:srgbClr val="D6DBDF"/>
             </a:solidFill>
-            <a:prstDash val="solid"/>
           </a:ln>
-          <a:effectLst>
-            <a:outerShdw sx="100000" sy="100000" kx="0" ky="0" algn="bl" rotWithShape="0" blurRad="50800" dist="12700" dir="5400000">
-              <a:srgbClr val="1C2E42">
-                <a:alpha val="10000"/>
-              </a:srgbClr>
-            </a:outerShdw>
-          </a:effectLst>
-        </p:spPr>
-      </p:sp>
-      <p:sp>
-        <p:nvSpPr>
-          <p:cNvPr id="25" name="Text 23"/>
-          <p:cNvSpPr/>
-          <p:nvPr/>
-        </p:nvSpPr>
-        <p:spPr>
-          <a:xfrm>
-            <a:off x="4221480" y="1481328"/>
-            <a:ext cx="1447800" cy="384048"/>
-          </a:xfrm>
-          <a:prstGeom prst="rect">
-            <a:avLst/>
-          </a:prstGeom>
-          <a:noFill/>
-          <a:ln/>
         </p:spPr>
         <p:txBody>
           <a:bodyPr wrap="square" rtlCol="0" anchor="ctr"/>
@@ -10867,7 +10789,7 @@
               <a:buNone/>
             </a:pPr>
             <a:r>
-              <a:rPr lang="en-US" sz="900" dirty="0">
+              <a:rPr lang="en-US" sz="900" b="1" dirty="0">
                 <a:solidFill>
                   <a:srgbClr val="17324D"/>
                 </a:solidFill>
@@ -10883,7 +10805,7 @@
       </p:sp>
       <p:sp>
         <p:nvSpPr>
-          <p:cNvPr id="26" name="Shape 24"/>
+          <p:cNvPr id="23" name="Text 21"/>
           <p:cNvSpPr/>
           <p:nvPr/>
         </p:nvSpPr>
@@ -10904,33 +10826,7 @@
             <a:solidFill>
               <a:srgbClr val="D6DBDF"/>
             </a:solidFill>
-            <a:prstDash val="solid"/>
           </a:ln>
-          <a:effectLst>
-            <a:outerShdw sx="100000" sy="100000" kx="0" ky="0" algn="bl" rotWithShape="0" blurRad="50800" dist="12700" dir="5400000">
-              <a:srgbClr val="1C2E42">
-                <a:alpha val="10000"/>
-              </a:srgbClr>
-            </a:outerShdw>
-          </a:effectLst>
-        </p:spPr>
-      </p:sp>
-      <p:sp>
-        <p:nvSpPr>
-          <p:cNvPr id="27" name="Text 25"/>
-          <p:cNvSpPr/>
-          <p:nvPr/>
-        </p:nvSpPr>
-        <p:spPr>
-          <a:xfrm>
-            <a:off x="685800" y="1975104"/>
-            <a:ext cx="1447800" cy="384048"/>
-          </a:xfrm>
-          <a:prstGeom prst="rect">
-            <a:avLst/>
-          </a:prstGeom>
-          <a:noFill/>
-          <a:ln/>
         </p:spPr>
         <p:txBody>
           <a:bodyPr wrap="square" rtlCol="0" anchor="ctr"/>
@@ -10940,7 +10836,7 @@
               <a:buNone/>
             </a:pPr>
             <a:r>
-              <a:rPr lang="en-US" sz="900" dirty="0">
+              <a:rPr lang="en-US" sz="900" b="1" dirty="0">
                 <a:solidFill>
                   <a:srgbClr val="17324D"/>
                 </a:solidFill>
@@ -10956,7 +10852,7 @@
       </p:sp>
       <p:sp>
         <p:nvSpPr>
-          <p:cNvPr id="28" name="Shape 26"/>
+          <p:cNvPr id="24" name="Text 22"/>
           <p:cNvSpPr/>
           <p:nvPr/>
         </p:nvSpPr>
@@ -10977,33 +10873,7 @@
             <a:solidFill>
               <a:srgbClr val="D6DBDF"/>
             </a:solidFill>
-            <a:prstDash val="solid"/>
           </a:ln>
-          <a:effectLst>
-            <a:outerShdw sx="100000" sy="100000" kx="0" ky="0" algn="bl" rotWithShape="0" blurRad="50800" dist="12700" dir="5400000">
-              <a:srgbClr val="1C2E42">
-                <a:alpha val="10000"/>
-              </a:srgbClr>
-            </a:outerShdw>
-          </a:effectLst>
-        </p:spPr>
-      </p:sp>
-      <p:sp>
-        <p:nvSpPr>
-          <p:cNvPr id="29" name="Text 27"/>
-          <p:cNvSpPr/>
-          <p:nvPr/>
-        </p:nvSpPr>
-        <p:spPr>
-          <a:xfrm>
-            <a:off x="2453640" y="1975104"/>
-            <a:ext cx="1447800" cy="384048"/>
-          </a:xfrm>
-          <a:prstGeom prst="rect">
-            <a:avLst/>
-          </a:prstGeom>
-          <a:noFill/>
-          <a:ln/>
         </p:spPr>
         <p:txBody>
           <a:bodyPr wrap="square" rtlCol="0" anchor="ctr"/>
@@ -11013,7 +10883,7 @@
               <a:buNone/>
             </a:pPr>
             <a:r>
-              <a:rPr lang="en-US" sz="900" dirty="0">
+              <a:rPr lang="en-US" sz="900" b="1" dirty="0">
                 <a:solidFill>
                   <a:srgbClr val="17324D"/>
                 </a:solidFill>
@@ -11029,7 +10899,7 @@
       </p:sp>
       <p:sp>
         <p:nvSpPr>
-          <p:cNvPr id="30" name="Shape 28"/>
+          <p:cNvPr id="25" name="Shape 23"/>
           <p:cNvSpPr/>
           <p:nvPr/>
         </p:nvSpPr>
@@ -11063,7 +10933,7 @@
       </p:sp>
       <p:sp>
         <p:nvSpPr>
-          <p:cNvPr id="31" name="Text 29"/>
+          <p:cNvPr id="26" name="Text 24"/>
           <p:cNvSpPr/>
           <p:nvPr/>
         </p:nvSpPr>
@@ -11104,7 +10974,7 @@
       </p:sp>
       <p:sp>
         <p:nvSpPr>
-          <p:cNvPr id="32" name="Shape 30"/>
+          <p:cNvPr id="27" name="Shape 25"/>
           <p:cNvSpPr/>
           <p:nvPr/>
         </p:nvSpPr>
@@ -11138,7 +11008,7 @@
       </p:sp>
       <p:sp>
         <p:nvSpPr>
-          <p:cNvPr id="33" name="Text 31"/>
+          <p:cNvPr id="28" name="Text 26"/>
           <p:cNvSpPr/>
           <p:nvPr/>
         </p:nvSpPr>
@@ -11179,7 +11049,7 @@
       </p:sp>
       <p:sp>
         <p:nvSpPr>
-          <p:cNvPr id="34" name="Shape 32"/>
+          <p:cNvPr id="29" name="Shape 27"/>
           <p:cNvSpPr/>
           <p:nvPr/>
         </p:nvSpPr>
@@ -11213,7 +11083,7 @@
       </p:sp>
       <p:sp>
         <p:nvSpPr>
-          <p:cNvPr id="35" name="Text 33"/>
+          <p:cNvPr id="30" name="Text 28"/>
           <p:cNvSpPr/>
           <p:nvPr/>
         </p:nvSpPr>
@@ -11254,7 +11124,7 @@
       </p:sp>
       <p:sp>
         <p:nvSpPr>
-          <p:cNvPr id="36" name="Text 34"/>
+          <p:cNvPr id="31" name="Text 29"/>
           <p:cNvSpPr/>
           <p:nvPr/>
         </p:nvSpPr>
@@ -11293,7 +11163,7 @@
       </p:sp>
       <p:sp>
         <p:nvSpPr>
-          <p:cNvPr id="37" name="Shape 35"/>
+          <p:cNvPr id="32" name="Shape 30"/>
           <p:cNvSpPr/>
           <p:nvPr/>
         </p:nvSpPr>
@@ -11316,7 +11186,7 @@
       </p:sp>
       <p:sp>
         <p:nvSpPr>
-          <p:cNvPr id="38" name="Shape 36"/>
+          <p:cNvPr id="33" name="Shape 31"/>
           <p:cNvSpPr/>
           <p:nvPr/>
         </p:nvSpPr>
@@ -11339,7 +11209,7 @@
       </p:sp>
       <p:sp>
         <p:nvSpPr>
-          <p:cNvPr id="39" name="Shape 37"/>
+          <p:cNvPr id="34" name="Shape 32"/>
           <p:cNvSpPr/>
           <p:nvPr/>
         </p:nvSpPr>
@@ -11362,7 +11232,7 @@
       </p:sp>
       <p:sp>
         <p:nvSpPr>
-          <p:cNvPr id="40" name="Shape 38"/>
+          <p:cNvPr id="35" name="Shape 33"/>
           <p:cNvSpPr/>
           <p:nvPr/>
         </p:nvSpPr>
@@ -11385,7 +11255,7 @@
       </p:sp>
       <p:sp>
         <p:nvSpPr>
-          <p:cNvPr id="41" name="Shape 39"/>
+          <p:cNvPr id="36" name="Shape 34"/>
           <p:cNvSpPr/>
           <p:nvPr/>
         </p:nvSpPr>

--- a/lessons/1-7/slides.pptx
+++ b/lessons/1-7/slides.pptx
@@ -2584,7 +2584,7 @@
                 <a:ea typeface="Outfit" pitchFamily="34" charset="-122"/>
                 <a:cs typeface="Outfit" pitchFamily="34" charset="-120"/>
               </a:rPr>
-              <a:t>6.NS.3</a:t>
+              <a:t>6.NOS.3</a:t>
             </a:r>
             <a:endParaRPr lang="en-US" sz="1000" dirty="0"/>
           </a:p>
@@ -3307,7 +3307,7 @@
                 <a:ea typeface="Outfit" pitchFamily="34" charset="-122"/>
                 <a:cs typeface="Outfit" pitchFamily="34" charset="-120"/>
               </a:rPr>
-              <a:t>6.NS.3</a:t>
+              <a:t>6.NOS.3</a:t>
             </a:r>
             <a:endParaRPr lang="en-US" sz="900" dirty="0"/>
           </a:p>
@@ -4436,7 +4436,7 @@
                 <a:ea typeface="Outfit" pitchFamily="34" charset="-122"/>
                 <a:cs typeface="Outfit" pitchFamily="34" charset="-120"/>
               </a:rPr>
-              <a:t>6.NS.3</a:t>
+              <a:t>6.NOS.3</a:t>
             </a:r>
             <a:endParaRPr lang="en-US" sz="900" dirty="0"/>
           </a:p>
@@ -5593,7 +5593,7 @@
                 <a:ea typeface="Outfit" pitchFamily="34" charset="-122"/>
                 <a:cs typeface="Outfit" pitchFamily="34" charset="-120"/>
               </a:rPr>
-              <a:t>6.NS.3</a:t>
+              <a:t>6.NOS.3</a:t>
             </a:r>
             <a:endParaRPr lang="en-US" sz="900" dirty="0"/>
           </a:p>
@@ -6929,7 +6929,7 @@
                 <a:ea typeface="Outfit" pitchFamily="34" charset="-122"/>
                 <a:cs typeface="Outfit" pitchFamily="34" charset="-120"/>
               </a:rPr>
-              <a:t>6.NS.3</a:t>
+              <a:t>6.NOS.3</a:t>
             </a:r>
             <a:endParaRPr lang="en-US" sz="900" dirty="0"/>
           </a:p>
@@ -8223,7 +8223,7 @@
                 <a:ea typeface="Outfit" pitchFamily="34" charset="-122"/>
                 <a:cs typeface="Outfit" pitchFamily="34" charset="-120"/>
               </a:rPr>
-              <a:t>6.NS.3</a:t>
+              <a:t>6.NOS.3</a:t>
             </a:r>
             <a:endParaRPr lang="en-US" sz="900" dirty="0"/>
           </a:p>
@@ -9285,7 +9285,7 @@
                 <a:ea typeface="Outfit" pitchFamily="34" charset="-122"/>
                 <a:cs typeface="Outfit" pitchFamily="34" charset="-120"/>
               </a:rPr>
-              <a:t>6.NS.3</a:t>
+              <a:t>6.NOS.3</a:t>
             </a:r>
             <a:endParaRPr lang="en-US" sz="900" dirty="0"/>
           </a:p>
@@ -9673,7 +9673,7 @@
                 <a:ea typeface="Hanken Grotesk" pitchFamily="34" charset="-122"/>
                 <a:cs typeface="Hanken Grotesk" pitchFamily="34" charset="-120"/>
               </a:rPr>
-              <a:t>A ribbon is 16.8 feet long. You cut it into pieces that are each 2.4 feet long. How many pieces do you get?</a:t>
+              <a:t>A water tank holds 19.2 liters. It is poured into bottles that each hold 1.6 liters. How many bottles can be filled?</a:t>
             </a:r>
             <a:endParaRPr lang="en-US" sz="1050" dirty="0"/>
           </a:p>
@@ -9962,7 +9962,7 @@
                 <a:ea typeface="Hanken Grotesk" pitchFamily="34" charset="-122"/>
                 <a:cs typeface="Hanken Grotesk" pitchFamily="34" charset="-120"/>
               </a:rPr>
-              <a:t>A ribbon is 16.8 feet long and you cut pieces that are each 2.4 feet. How does decimal division tell you how many pieces you can cut?</a:t>
+              <a:t>The station has 22.5 meters of oxygen tubing, cut into hoses that are each 1.5 meters long. How does decimal division tell you how many hoses you can make?</a:t>
             </a:r>
             <a:endParaRPr lang="en-US" sz="1000" dirty="0"/>
           </a:p>
@@ -10250,7 +10250,7 @@
                 <a:ea typeface="Outfit" pitchFamily="34" charset="-122"/>
                 <a:cs typeface="Outfit" pitchFamily="34" charset="-120"/>
               </a:rPr>
-              <a:t>6.NS.3</a:t>
+              <a:t>6.NOS.3</a:t>
             </a:r>
             <a:endParaRPr lang="en-US" sz="900" dirty="0"/>
           </a:p>
@@ -11167,7 +11167,7 @@
                 <a:ea typeface="Outfit" pitchFamily="34" charset="-122"/>
                 <a:cs typeface="Outfit" pitchFamily="34" charset="-120"/>
               </a:rPr>
-              <a:t>6.NS.3</a:t>
+              <a:t>6.NOS.3</a:t>
             </a:r>
             <a:endParaRPr lang="en-US" sz="900" dirty="0"/>
           </a:p>
@@ -12295,7 +12295,7 @@
                 <a:ea typeface="Outfit" pitchFamily="34" charset="-122"/>
                 <a:cs typeface="Outfit" pitchFamily="34" charset="-120"/>
               </a:rPr>
-              <a:t>6.NS.3</a:t>
+              <a:t>6.NOS.3</a:t>
             </a:r>
             <a:endParaRPr lang="en-US" sz="900" dirty="0"/>
           </a:p>
@@ -13728,7 +13728,7 @@
                 <a:ea typeface="Outfit" pitchFamily="34" charset="-122"/>
                 <a:cs typeface="Outfit" pitchFamily="34" charset="-120"/>
               </a:rPr>
-              <a:t>6.NS.3</a:t>
+              <a:t>6.NOS.3</a:t>
             </a:r>
             <a:endParaRPr lang="en-US" sz="900" dirty="0"/>
           </a:p>
@@ -14542,7 +14542,7 @@
                 <a:ea typeface="Outfit" pitchFamily="34" charset="-122"/>
                 <a:cs typeface="Outfit" pitchFamily="34" charset="-120"/>
               </a:rPr>
-              <a:t>6.NS.3</a:t>
+              <a:t>6.NOS.3</a:t>
             </a:r>
             <a:endParaRPr lang="en-US" sz="900" dirty="0"/>
           </a:p>
@@ -15649,7 +15649,7 @@
                 <a:ea typeface="Outfit" pitchFamily="34" charset="-122"/>
                 <a:cs typeface="Outfit" pitchFamily="34" charset="-120"/>
               </a:rPr>
-              <a:t>6.NS.3</a:t>
+              <a:t>6.NOS.3</a:t>
             </a:r>
             <a:endParaRPr lang="en-US" sz="900" dirty="0"/>
           </a:p>
@@ -16756,7 +16756,7 @@
                 <a:ea typeface="Outfit" pitchFamily="34" charset="-122"/>
                 <a:cs typeface="Outfit" pitchFamily="34" charset="-120"/>
               </a:rPr>
-              <a:t>6.NS.3</a:t>
+              <a:t>6.NOS.3</a:t>
             </a:r>
             <a:endParaRPr lang="en-US" sz="900" dirty="0"/>
           </a:p>
@@ -17172,7 +17172,7 @@
                 <a:ea typeface="Hanken Grotesk" pitchFamily="34" charset="-122"/>
                 <a:cs typeface="Hanken Grotesk" pitchFamily="34" charset="-120"/>
               </a:rPr>
-              <a:t>A ribbon is 16.8 feet long and you cut pieces that are each 2.4 feet. How does decimal division tell you how many pieces you can cut?</a:t>
+              <a:t>The station has 22.5 meters of oxygen tubing, cut into hoses that are each 1.5 meters long. How does decimal division tell you how many hoses you can make?</a:t>
             </a:r>
             <a:endParaRPr lang="en-US" sz="1400" dirty="0"/>
           </a:p>
@@ -17863,7 +17863,7 @@
                 <a:ea typeface="Outfit" pitchFamily="34" charset="-122"/>
                 <a:cs typeface="Outfit" pitchFamily="34" charset="-120"/>
               </a:rPr>
-              <a:t>6.NS.3</a:t>
+              <a:t>6.NOS.3</a:t>
             </a:r>
             <a:endParaRPr lang="en-US" sz="900" dirty="0"/>
           </a:p>
@@ -18970,7 +18970,7 @@
                 <a:ea typeface="Outfit" pitchFamily="34" charset="-122"/>
                 <a:cs typeface="Outfit" pitchFamily="34" charset="-120"/>
               </a:rPr>
-              <a:t>6.NS.3</a:t>
+              <a:t>6.NOS.3</a:t>
             </a:r>
             <a:endParaRPr lang="en-US" sz="900" dirty="0"/>
           </a:p>
@@ -20030,7 +20030,7 @@
                 <a:ea typeface="Outfit" pitchFamily="34" charset="-122"/>
                 <a:cs typeface="Outfit" pitchFamily="34" charset="-120"/>
               </a:rPr>
-              <a:t>6.NS.3</a:t>
+              <a:t>6.NOS.3</a:t>
             </a:r>
             <a:endParaRPr lang="en-US" sz="900" dirty="0"/>
           </a:p>
@@ -20998,7 +20998,7 @@
                 <a:ea typeface="Outfit" pitchFamily="34" charset="-122"/>
                 <a:cs typeface="Outfit" pitchFamily="34" charset="-120"/>
               </a:rPr>
-              <a:t>6.NS.3</a:t>
+              <a:t>6.NOS.3</a:t>
             </a:r>
             <a:endParaRPr lang="en-US" sz="900" dirty="0"/>
           </a:p>
